--- a/CPE Electives (1 - 3)/01. Lectures Notebook/000. Presentations & Text Books/01. Presentation Slides/38. Hierarchical Clustering/25.1. Hierarchical Clustering.pptx
+++ b/CPE Electives (1 - 3)/01. Lectures Notebook/000. Presentations & Text Books/01. Presentation Slides/38. Hierarchical Clustering/25.1. Hierarchical Clustering.pptx
@@ -5,10 +5,10 @@
     <p:sldMasterId id="2147483684" r:id="rId1"/>
   </p:sldMasterIdLst>
   <p:notesMasterIdLst>
-    <p:notesMasterId r:id="rId20"/>
+    <p:notesMasterId r:id="rId21"/>
   </p:notesMasterIdLst>
   <p:handoutMasterIdLst>
-    <p:handoutMasterId r:id="rId21"/>
+    <p:handoutMasterId r:id="rId22"/>
   </p:handoutMasterIdLst>
   <p:sldIdLst>
     <p:sldId id="258" r:id="rId2"/>
@@ -28,7 +28,8 @@
     <p:sldId id="357" r:id="rId16"/>
     <p:sldId id="358" r:id="rId17"/>
     <p:sldId id="359" r:id="rId18"/>
-    <p:sldId id="314" r:id="rId19"/>
+    <p:sldId id="360" r:id="rId19"/>
+    <p:sldId id="314" r:id="rId20"/>
   </p:sldIdLst>
   <p:sldSz cx="12192000" cy="6858000"/>
   <p:notesSz cx="6858000" cy="9144000"/>
@@ -129,7 +130,7 @@
   </p:defaultTextStyle>
   <p:extLst>
     <p:ext uri="{EFAFB233-063F-42B5-8137-9DF3F51BA10A}">
-      <p15:sldGuideLst xmlns:p15="http://schemas.microsoft.com/office/powerpoint/2012/main" xmlns="">
+      <p15:sldGuideLst xmlns:p15="http://schemas.microsoft.com/office/powerpoint/2012/main">
         <p15:guide id="1" orient="horz" pos="2160">
           <p15:clr>
             <a:srgbClr val="A4A3A4"/>
@@ -143,7 +144,7 @@
       </p15:sldGuideLst>
     </p:ext>
     <p:ext uri="{2D200454-40CA-4A62-9FC3-DE9A4176ACB9}">
-      <p15:notesGuideLst xmlns:p15="http://schemas.microsoft.com/office/powerpoint/2012/main" xmlns="">
+      <p15:notesGuideLst xmlns:p15="http://schemas.microsoft.com/office/powerpoint/2012/main">
         <p15:guide id="1" orient="horz" pos="2880">
           <p15:clr>
             <a:srgbClr val="A4A3A4"/>
@@ -242,7 +243,7 @@
           <a:p>
             <a:fld id="{3B6B94FD-5702-4F25-9A4D-07294FF3292C}" type="datetimeFigureOut">
               <a:rPr lang="en-PH" smtClean="0"/>
-              <a:t>06/10/2024</a:t>
+              <a:t>26 Aug 2026</a:t>
             </a:fld>
             <a:endParaRPr lang="en-PH"/>
           </a:p>
@@ -407,7 +408,7 @@
           <a:p>
             <a:fld id="{8365AC51-C568-4371-A28D-D14CF2BCF8BA}" type="datetimeFigureOut">
               <a:rPr lang="en-US" smtClean="0"/>
-              <a:t>10/6/2024</a:t>
+              <a:t>8/26/2026</a:t>
             </a:fld>
             <a:endParaRPr lang="en-US"/>
           </a:p>
@@ -1023,13 +1024,6 @@
   <p:clrMapOvr>
     <a:masterClrMapping/>
   </p:clrMapOvr>
-  <p:timing>
-    <p:tnLst>
-      <p:par>
-        <p:cTn id="1" dur="indefinite" restart="never" nodeType="tmRoot"/>
-      </p:par>
-    </p:tnLst>
-  </p:timing>
 </p:sldLayout>
 </file>
 
@@ -1231,7 +1225,7 @@
           <p:cNvPr id="7" name="Footer Placeholder 4">
             <a:extLst>
               <a:ext uri="{FF2B5EF4-FFF2-40B4-BE49-F238E27FC236}">
-                <a16:creationId xmlns:a16="http://schemas.microsoft.com/office/drawing/2014/main" xmlns="" id="{D057E4A9-8BC1-4D03-B0CD-00353C3D487D}"/>
+                <a16:creationId xmlns:a16="http://schemas.microsoft.com/office/drawing/2014/main" id="{D057E4A9-8BC1-4D03-B0CD-00353C3D487D}"/>
               </a:ext>
             </a:extLst>
           </p:cNvPr>
@@ -3798,11 +3792,11 @@
           <a:p>
             <a:pPr algn="ctr"/>
             <a:r>
-              <a:rPr lang="en-US" sz="1400" b="1" dirty="0" smtClean="0"/>
+              <a:rPr lang="en-US" sz="1400" b="1" dirty="0"/>
               <a:t>HIERARCHICAL CLUSTERING</a:t>
             </a:r>
             <a:r>
-              <a:rPr lang="en-US" sz="1400" b="1" baseline="0" dirty="0" smtClean="0"/>
+              <a:rPr lang="en-US" sz="1400" b="1" baseline="0" dirty="0"/>
               <a:t> (HC)</a:t>
             </a:r>
             <a:endParaRPr lang="en-PH" sz="1400" b="1" dirty="0"/>
@@ -3892,13 +3886,6 @@
     <p:sldLayoutId id="2147483694" r:id="rId10"/>
     <p:sldLayoutId id="2147483695" r:id="rId11"/>
   </p:sldLayoutIdLst>
-  <p:timing>
-    <p:tnLst>
-      <p:par>
-        <p:cTn id="1" dur="indefinite" restart="never" nodeType="tmRoot"/>
-      </p:par>
-    </p:tnLst>
-  </p:timing>
   <p:hf hdr="0" ftr="0" dt="0"/>
   <p:txStyles>
     <p:titleStyle>
@@ -4194,7 +4181,7 @@
           <a:p>
             <a:pPr algn="ctr"/>
             <a:r>
-              <a:rPr lang="en-US" sz="4800" b="1" dirty="0" smtClean="0"/>
+              <a:rPr lang="en-US" sz="4800" b="1" dirty="0"/>
               <a:t>Hierarchical Clustering</a:t>
             </a:r>
             <a:endParaRPr lang="en-PH" sz="4800" b="1" dirty="0"/>
@@ -4244,12 +4231,8 @@
           <a:p>
             <a:pPr algn="ctr"/>
             <a:r>
-              <a:rPr lang="en-US" sz="2000" i="1" dirty="0" smtClean="0"/>
-              <a:t>College </a:t>
-            </a:r>
-            <a:r>
               <a:rPr lang="en-US" sz="2000" i="1" dirty="0"/>
-              <a:t>of Engineering</a:t>
+              <a:t>College of Engineering</a:t>
             </a:r>
           </a:p>
           <a:p>
@@ -4283,13 +4266,6 @@
   <p:clrMapOvr>
     <a:masterClrMapping/>
   </p:clrMapOvr>
-  <p:timing>
-    <p:tnLst>
-      <p:par>
-        <p:cTn id="1" dur="indefinite" restart="never" nodeType="tmRoot"/>
-      </p:par>
-    </p:tnLst>
-  </p:timing>
 </p:sld>
 </file>
 
@@ -4333,23 +4309,23 @@
           <a:lstStyle/>
           <a:p>
             <a:r>
-              <a:rPr lang="en-PH" sz="4400" b="1" dirty="0" smtClean="0"/>
+              <a:rPr lang="en-PH" sz="4400" b="1" dirty="0"/>
               <a:t>Types of HC:</a:t>
             </a:r>
           </a:p>
           <a:p>
-            <a:endParaRPr lang="en-US" b="1" dirty="0" smtClean="0"/>
+            <a:endParaRPr lang="en-US" b="1" dirty="0"/>
           </a:p>
           <a:p>
             <a:pPr marL="514350" indent="-514350">
               <a:buAutoNum type="arabicPeriod"/>
             </a:pPr>
             <a:r>
-              <a:rPr lang="en-US" sz="3200" b="1" dirty="0" smtClean="0"/>
+              <a:rPr lang="en-US" sz="3200" b="1" dirty="0"/>
               <a:t>Agglomerative (Bottom-Up Approach): </a:t>
             </a:r>
             <a:r>
-              <a:rPr lang="en-US" sz="3200" dirty="0" smtClean="0"/>
+              <a:rPr lang="en-US" sz="3200" dirty="0"/>
               <a:t>Start with each thing (or person) in its own group and merge until there’s just one big group.</a:t>
             </a:r>
           </a:p>
@@ -4357,7 +4333,7 @@
             <a:pPr marL="514350" indent="-514350">
               <a:buAutoNum type="arabicPeriod"/>
             </a:pPr>
-            <a:endParaRPr lang="en-US" sz="3200" dirty="0" smtClean="0"/>
+            <a:endParaRPr lang="en-US" sz="3200" dirty="0"/>
           </a:p>
           <a:p>
             <a:pPr marL="514350" indent="-514350">
@@ -4365,18 +4341,13 @@
               <a:buAutoNum type="arabicPeriod"/>
             </a:pPr>
             <a:r>
-              <a:rPr lang="en-US" sz="3200" b="1" dirty="0" smtClean="0"/>
-              <a:t>Divisive </a:t>
-            </a:r>
-            <a:r>
               <a:rPr lang="en-US" sz="3200" b="1" dirty="0"/>
-              <a:t>(Bottom-Up Approach): </a:t>
+              <a:t>Divisive (Bottom-Up Approach): </a:t>
             </a:r>
             <a:r>
               <a:rPr lang="en-US" sz="3200" dirty="0"/>
               <a:t>Start with one big group and split it into smaller groups. This is like starting with a whole group of friends and slowly dividing them into smaller cliques.</a:t>
             </a:r>
-            <a:endParaRPr lang="en-US" sz="3200" dirty="0" smtClean="0"/>
           </a:p>
         </p:txBody>
       </p:sp>
@@ -4390,13 +4361,6 @@
   <p:clrMapOvr>
     <a:masterClrMapping/>
   </p:clrMapOvr>
-  <p:timing>
-    <p:tnLst>
-      <p:par>
-        <p:cTn id="1" dur="indefinite" restart="never" nodeType="tmRoot"/>
-      </p:par>
-    </p:tnLst>
-  </p:timing>
 </p:sld>
 </file>
 
@@ -4440,27 +4404,23 @@
           <a:lstStyle/>
           <a:p>
             <a:r>
-              <a:rPr lang="en-PH" sz="4400" b="1" dirty="0" smtClean="0"/>
+              <a:rPr lang="en-PH" sz="4400" b="1" dirty="0"/>
               <a:t>How do we know which cluster (friends) are closest?</a:t>
             </a:r>
           </a:p>
           <a:p>
-            <a:endParaRPr lang="en-US" sz="4400" b="1" dirty="0" smtClean="0"/>
-          </a:p>
-          <a:p>
-            <a:r>
-              <a:rPr lang="en-US" sz="4000" b="1" dirty="0" smtClean="0"/>
-              <a:t>1. Euclidean </a:t>
-            </a:r>
+            <a:endParaRPr lang="en-US" sz="4400" b="1" dirty="0"/>
+          </a:p>
+          <a:p>
             <a:r>
               <a:rPr lang="en-US" sz="4000" b="1" dirty="0"/>
-              <a:t>Distance:</a:t>
+              <a:t>1. Euclidean Distance:</a:t>
             </a:r>
             <a:r>
               <a:rPr lang="en-US" sz="4000" dirty="0"/>
               <a:t> This is like drawing a straight line between two points on a map and measuring the distance. If two friends live close together, they’re probably more likely to hang out.</a:t>
             </a:r>
-            <a:endParaRPr lang="en-US" sz="4000" b="1" dirty="0" smtClean="0"/>
+            <a:endParaRPr lang="en-US" sz="4000" b="1" dirty="0"/>
           </a:p>
         </p:txBody>
       </p:sp>
@@ -4474,13 +4434,6 @@
   <p:clrMapOvr>
     <a:masterClrMapping/>
   </p:clrMapOvr>
-  <p:timing>
-    <p:tnLst>
-      <p:par>
-        <p:cTn id="1" dur="indefinite" restart="never" nodeType="tmRoot"/>
-      </p:par>
-    </p:tnLst>
-  </p:timing>
 </p:sld>
 </file>
 
@@ -4524,27 +4477,23 @@
           <a:lstStyle/>
           <a:p>
             <a:r>
-              <a:rPr lang="en-PH" sz="4400" b="1" dirty="0" smtClean="0"/>
+              <a:rPr lang="en-PH" sz="4400" b="1" dirty="0"/>
               <a:t>How do we know which cluster (friends) are closest?</a:t>
             </a:r>
           </a:p>
           <a:p>
-            <a:endParaRPr lang="en-US" sz="4400" b="1" dirty="0" smtClean="0"/>
-          </a:p>
-          <a:p>
-            <a:r>
-              <a:rPr lang="en-US" sz="4000" b="1" dirty="0" smtClean="0"/>
-              <a:t>2. Manhattan </a:t>
-            </a:r>
+            <a:endParaRPr lang="en-US" sz="4400" b="1" dirty="0"/>
+          </a:p>
+          <a:p>
             <a:r>
               <a:rPr lang="en-US" sz="4000" b="1" dirty="0"/>
-              <a:t>Distance:</a:t>
+              <a:t>2. Manhattan Distance:</a:t>
             </a:r>
             <a:r>
               <a:rPr lang="en-US" sz="4000" dirty="0"/>
               <a:t> Imagine walking only along streets on a grid, like in a city. This is another way of measuring how far things are.</a:t>
             </a:r>
-            <a:endParaRPr lang="en-US" sz="4000" b="1" dirty="0" smtClean="0"/>
+            <a:endParaRPr lang="en-US" sz="4000" b="1" dirty="0"/>
           </a:p>
         </p:txBody>
       </p:sp>
@@ -4558,13 +4507,6 @@
   <p:clrMapOvr>
     <a:masterClrMapping/>
   </p:clrMapOvr>
-  <p:timing>
-    <p:tnLst>
-      <p:par>
-        <p:cTn id="1" dur="indefinite" restart="never" nodeType="tmRoot"/>
-      </p:par>
-    </p:tnLst>
-  </p:timing>
 </p:sld>
 </file>
 
@@ -4609,22 +4551,18 @@
           <a:p>
             <a:r>
               <a:rPr lang="en-US" sz="4400" b="1" dirty="0"/>
-              <a:t>Linkage Methods: How Do We Merge Groups</a:t>
-            </a:r>
-            <a:r>
-              <a:rPr lang="en-US" sz="4400" b="1" dirty="0" smtClean="0"/>
-              <a:t>?</a:t>
-            </a:r>
-          </a:p>
-          <a:p>
-            <a:endParaRPr lang="en-US" sz="4400" b="1" dirty="0" smtClean="0"/>
+              <a:t>Linkage Methods: How Do We Merge Groups?</a:t>
+            </a:r>
+          </a:p>
+          <a:p>
+            <a:endParaRPr lang="en-US" sz="4400" b="1" dirty="0"/>
           </a:p>
           <a:p>
             <a:r>
               <a:rPr lang="en-US" sz="4000" dirty="0"/>
               <a:t>When we start merging groups of friends, we need to decide how to measure the distance between groups, not just between individual people. Here are three ways we can do this:</a:t>
             </a:r>
-            <a:endParaRPr lang="en-US" sz="4000" b="1" dirty="0" smtClean="0"/>
+            <a:endParaRPr lang="en-US" sz="4000" b="1" dirty="0"/>
           </a:p>
         </p:txBody>
       </p:sp>
@@ -4638,13 +4576,6 @@
   <p:clrMapOvr>
     <a:masterClrMapping/>
   </p:clrMapOvr>
-  <p:timing>
-    <p:tnLst>
-      <p:par>
-        <p:cTn id="1" dur="indefinite" restart="never" nodeType="tmRoot"/>
-      </p:par>
-    </p:tnLst>
-  </p:timing>
 </p:sld>
 </file>
 
@@ -4688,12 +4619,12 @@
           <a:lstStyle/>
           <a:p>
             <a:r>
-              <a:rPr lang="en-PH" sz="4400" b="1" dirty="0" smtClean="0"/>
+              <a:rPr lang="en-PH" sz="4400" b="1" dirty="0"/>
               <a:t>1. Single Linkage</a:t>
             </a:r>
           </a:p>
           <a:p>
-            <a:endParaRPr lang="en-US" sz="4400" b="1" dirty="0" smtClean="0"/>
+            <a:endParaRPr lang="en-US" sz="4400" b="1" dirty="0"/>
           </a:p>
           <a:p>
             <a:r>
@@ -4722,13 +4653,6 @@
   <p:clrMapOvr>
     <a:masterClrMapping/>
   </p:clrMapOvr>
-  <p:timing>
-    <p:tnLst>
-      <p:par>
-        <p:cTn id="1" dur="indefinite" restart="never" nodeType="tmRoot"/>
-      </p:par>
-    </p:tnLst>
-  </p:timing>
 </p:sld>
 </file>
 
@@ -4772,12 +4696,12 @@
           <a:lstStyle/>
           <a:p>
             <a:r>
-              <a:rPr lang="en-PH" sz="4400" b="1" dirty="0" smtClean="0"/>
+              <a:rPr lang="en-PH" sz="4400" b="1" dirty="0"/>
               <a:t>2. Complete Linkage:</a:t>
             </a:r>
           </a:p>
           <a:p>
-            <a:endParaRPr lang="en-US" sz="4400" b="1" dirty="0" smtClean="0"/>
+            <a:endParaRPr lang="en-US" sz="4400" b="1" dirty="0"/>
           </a:p>
           <a:p>
             <a:r>
@@ -4806,13 +4730,6 @@
   <p:clrMapOvr>
     <a:masterClrMapping/>
   </p:clrMapOvr>
-  <p:timing>
-    <p:tnLst>
-      <p:par>
-        <p:cTn id="1" dur="indefinite" restart="never" nodeType="tmRoot"/>
-      </p:par>
-    </p:tnLst>
-  </p:timing>
 </p:sld>
 </file>
 
@@ -4856,12 +4773,12 @@
           <a:lstStyle/>
           <a:p>
             <a:r>
-              <a:rPr lang="en-PH" sz="4400" b="1" dirty="0" smtClean="0"/>
+              <a:rPr lang="en-PH" sz="4400" b="1" dirty="0"/>
               <a:t>3. Average Linkage:</a:t>
             </a:r>
           </a:p>
           <a:p>
-            <a:endParaRPr lang="en-US" sz="4400" b="1" dirty="0" smtClean="0"/>
+            <a:endParaRPr lang="en-US" sz="4400" b="1" dirty="0"/>
           </a:p>
           <a:p>
             <a:r>
@@ -4874,25 +4791,21 @@
             </a:r>
             <a:r>
               <a:rPr lang="en-US" sz="3200" dirty="0"/>
-              <a:t> between all the people in the two groups</a:t>
-            </a:r>
-            <a:r>
-              <a:rPr lang="en-US" sz="3200" dirty="0" smtClean="0"/>
-              <a:t>.</a:t>
+              <a:t> between all the people in the two groups.</a:t>
             </a:r>
           </a:p>
           <a:p>
             <a:endParaRPr lang="en-US" sz="3200" dirty="0"/>
           </a:p>
           <a:p>
-            <a:endParaRPr lang="en-US" sz="3200" dirty="0" smtClean="0"/>
-          </a:p>
-          <a:p>
             <a:endParaRPr lang="en-US" sz="3200" dirty="0"/>
           </a:p>
           <a:p>
-            <a:r>
-              <a:rPr lang="en-US" sz="3200" dirty="0" smtClean="0"/>
+            <a:endParaRPr lang="en-US" sz="3200" dirty="0"/>
+          </a:p>
+          <a:p>
+            <a:r>
+              <a:rPr lang="en-US" sz="3200" dirty="0"/>
               <a:t>* </a:t>
             </a:r>
             <a:r>
@@ -4905,13 +4818,8 @@
             </a:r>
             <a:r>
               <a:rPr lang="en-US" sz="2800" dirty="0"/>
-              <a:t>, which tries to make groups that are nice and balanced</a:t>
-            </a:r>
-            <a:r>
-              <a:rPr lang="en-US" sz="2800" dirty="0" smtClean="0"/>
-              <a:t>. *</a:t>
-            </a:r>
-            <a:endParaRPr lang="en-US" sz="2800" dirty="0"/>
+              <a:t>, which tries to make groups that are nice and balanced. *</a:t>
+            </a:r>
           </a:p>
         </p:txBody>
       </p:sp>
@@ -4925,13 +4833,6 @@
   <p:clrMapOvr>
     <a:masterClrMapping/>
   </p:clrMapOvr>
-  <p:timing>
-    <p:tnLst>
-      <p:par>
-        <p:cTn id="1" dur="indefinite" restart="never" nodeType="tmRoot"/>
-      </p:par>
-    </p:tnLst>
-  </p:timing>
 </p:sld>
 </file>
 
@@ -4975,30 +4876,21 @@
           <a:lstStyle/>
           <a:p>
             <a:r>
-              <a:rPr lang="en-PH" sz="4400" b="1" dirty="0" smtClean="0"/>
+              <a:rPr lang="en-PH" sz="4400" b="1" dirty="0"/>
               <a:t>4. </a:t>
             </a:r>
             <a:r>
               <a:rPr lang="en-US" sz="4400" b="1" dirty="0"/>
-              <a:t>Ward's Method</a:t>
-            </a:r>
-            <a:r>
-              <a:rPr lang="en-US" sz="4400" b="1" dirty="0" smtClean="0"/>
-              <a:t>:</a:t>
-            </a:r>
-            <a:endParaRPr lang="en-US" sz="4400" b="1" dirty="0" smtClean="0"/>
-          </a:p>
-          <a:p>
-            <a:endParaRPr lang="en-US" sz="3200" dirty="0" smtClean="0"/>
-          </a:p>
-          <a:p>
-            <a:r>
-              <a:rPr lang="en-US" sz="3200" dirty="0" smtClean="0"/>
-              <a:t>Minimizes </a:t>
-            </a:r>
+              <a:t>Ward's Method:</a:t>
+            </a:r>
+          </a:p>
+          <a:p>
+            <a:endParaRPr lang="en-US" sz="3200" dirty="0"/>
+          </a:p>
+          <a:p>
             <a:r>
               <a:rPr lang="en-US" sz="3200" dirty="0"/>
-              <a:t>the total variance within clusters.</a:t>
+              <a:t>Minimizes the total variance within clusters.</a:t>
             </a:r>
             <a:r>
               <a:rPr lang="en-PH" sz="3200" b="1" dirty="0"/>
@@ -5013,7 +4905,7 @@
           </a:p>
           <a:p>
             <a:r>
-              <a:rPr lang="en-US" sz="3200" dirty="0" smtClean="0"/>
+              <a:rPr lang="en-US" sz="3200" dirty="0"/>
               <a:t>* </a:t>
             </a:r>
             <a:r>
@@ -5026,13 +4918,8 @@
             </a:r>
             <a:r>
               <a:rPr lang="en-US" sz="2800" dirty="0"/>
-              <a:t>, which tries to make groups that are nice and balanced</a:t>
-            </a:r>
-            <a:r>
-              <a:rPr lang="en-US" sz="2800" dirty="0" smtClean="0"/>
-              <a:t>. *</a:t>
-            </a:r>
-            <a:endParaRPr lang="en-US" sz="2800" dirty="0"/>
+              <a:t>, which tries to make groups that are nice and balanced. *</a:t>
+            </a:r>
           </a:p>
         </p:txBody>
       </p:sp>
@@ -5046,17 +4933,82 @@
   <p:clrMapOvr>
     <a:masterClrMapping/>
   </p:clrMapOvr>
-  <p:timing>
-    <p:tnLst>
-      <p:par>
-        <p:cTn id="1" dur="indefinite" restart="never" nodeType="tmRoot"/>
-      </p:par>
-    </p:tnLst>
-  </p:timing>
 </p:sld>
 </file>
 
 <file path=ppt/slides/slide18.xml><?xml version="1.0" encoding="utf-8"?>
+<p:sld xmlns:a="http://schemas.openxmlformats.org/drawingml/2006/main" xmlns:r="http://schemas.openxmlformats.org/officeDocument/2006/relationships" xmlns:p="http://schemas.openxmlformats.org/presentationml/2006/main">
+  <p:cSld>
+    <p:spTree>
+      <p:nvGrpSpPr>
+        <p:cNvPr id="1" name="">
+          <a:extLst>
+            <a:ext uri="{FF2B5EF4-FFF2-40B4-BE49-F238E27FC236}">
+              <a16:creationId xmlns:a16="http://schemas.microsoft.com/office/drawing/2014/main" id="{1B62D409-5EEF-C364-8E09-23658624B16E}"/>
+            </a:ext>
+          </a:extLst>
+        </p:cNvPr>
+        <p:cNvGrpSpPr/>
+        <p:nvPr/>
+      </p:nvGrpSpPr>
+      <p:grpSpPr>
+        <a:xfrm>
+          <a:off x="0" y="0"/>
+          <a:ext cx="0" cy="0"/>
+          <a:chOff x="0" y="0"/>
+          <a:chExt cx="0" cy="0"/>
+        </a:xfrm>
+      </p:grpSpPr>
+      <p:pic>
+        <p:nvPicPr>
+          <p:cNvPr id="3" name="Picture 2">
+            <a:extLst>
+              <a:ext uri="{FF2B5EF4-FFF2-40B4-BE49-F238E27FC236}">
+                <a16:creationId xmlns:a16="http://schemas.microsoft.com/office/drawing/2014/main" id="{62C3AEBA-1AFF-721F-26C9-8B20456E54FA}"/>
+              </a:ext>
+            </a:extLst>
+          </p:cNvPr>
+          <p:cNvPicPr>
+            <a:picLocks noChangeAspect="1"/>
+          </p:cNvPicPr>
+          <p:nvPr/>
+        </p:nvPicPr>
+        <p:blipFill>
+          <a:blip r:embed="rId2">
+            <a:extLst>
+              <a:ext uri="{28A0092B-C50C-407E-A947-70E740481C1C}">
+                <a14:useLocalDpi xmlns:a14="http://schemas.microsoft.com/office/drawing/2010/main" val="0"/>
+              </a:ext>
+            </a:extLst>
+          </a:blip>
+          <a:stretch>
+            <a:fillRect/>
+          </a:stretch>
+        </p:blipFill>
+        <p:spPr>
+          <a:xfrm>
+            <a:off x="3663356" y="796632"/>
+            <a:ext cx="4865287" cy="5264736"/>
+          </a:xfrm>
+          <a:prstGeom prst="rect">
+            <a:avLst/>
+          </a:prstGeom>
+        </p:spPr>
+      </p:pic>
+    </p:spTree>
+    <p:extLst>
+      <p:ext uri="{BB962C8B-B14F-4D97-AF65-F5344CB8AC3E}">
+        <p14:creationId xmlns:p14="http://schemas.microsoft.com/office/powerpoint/2010/main" val="3636206563"/>
+      </p:ext>
+    </p:extLst>
+  </p:cSld>
+  <p:clrMapOvr>
+    <a:masterClrMapping/>
+  </p:clrMapOvr>
+</p:sld>
+</file>
+
+<file path=ppt/slides/slide19.xml><?xml version="1.0" encoding="utf-8"?>
 <p:sld xmlns:a="http://schemas.openxmlformats.org/drawingml/2006/main" xmlns:r="http://schemas.openxmlformats.org/officeDocument/2006/relationships" xmlns:p="http://schemas.openxmlformats.org/presentationml/2006/main">
   <p:cSld>
     <p:spTree>
@@ -5130,13 +5082,6 @@
   <p:clrMapOvr>
     <a:masterClrMapping/>
   </p:clrMapOvr>
-  <p:timing>
-    <p:tnLst>
-      <p:par>
-        <p:cTn id="1" dur="indefinite" restart="never" nodeType="tmRoot"/>
-      </p:par>
-    </p:tnLst>
-  </p:timing>
 </p:sld>
 </file>
 
@@ -5180,7 +5125,7 @@
           <a:lstStyle/>
           <a:p>
             <a:r>
-              <a:rPr lang="en-US" sz="4400" b="1" dirty="0" smtClean="0"/>
+              <a:rPr lang="en-US" sz="4400" b="1" dirty="0"/>
               <a:t>Hierarchical Clustering (HC)</a:t>
             </a:r>
           </a:p>
@@ -5189,7 +5134,7 @@
           </a:p>
           <a:p>
             <a:r>
-              <a:rPr lang="en-US" sz="4400" dirty="0" smtClean="0"/>
+              <a:rPr lang="en-US" sz="4400" dirty="0"/>
               <a:t>HC is a special way of grouping things where we start with everything in its own group, and then we slowly combine the most similar group until there’s just one big group</a:t>
             </a:r>
             <a:endParaRPr lang="en-PH" sz="4400" dirty="0">
@@ -5209,13 +5154,6 @@
   <p:clrMapOvr>
     <a:masterClrMapping/>
   </p:clrMapOvr>
-  <p:timing>
-    <p:tnLst>
-      <p:par>
-        <p:cTn id="1" dur="indefinite" restart="never" nodeType="tmRoot"/>
-      </p:par>
-    </p:tnLst>
-  </p:timing>
 </p:sld>
 </file>
 
@@ -5260,23 +5198,19 @@
           <a:p>
             <a:r>
               <a:rPr lang="en-US" sz="4400" dirty="0"/>
-              <a:t>Think of it </a:t>
-            </a:r>
-            <a:r>
-              <a:rPr lang="en-US" sz="4400" dirty="0" smtClean="0"/>
-              <a:t>like building a </a:t>
-            </a:r>
-            <a:r>
-              <a:rPr lang="en-US" sz="4400" b="1" dirty="0" smtClean="0"/>
+              <a:t>Think of it like building a </a:t>
+            </a:r>
+            <a:r>
+              <a:rPr lang="en-US" sz="4400" b="1" dirty="0"/>
               <a:t>family tree</a:t>
             </a:r>
             <a:r>
-              <a:rPr lang="en-US" sz="4400" dirty="0" smtClean="0"/>
+              <a:rPr lang="en-US" sz="4400" dirty="0"/>
               <a:t>:</a:t>
             </a:r>
           </a:p>
           <a:p>
-            <a:endParaRPr lang="en-US" dirty="0" smtClean="0"/>
+            <a:endParaRPr lang="en-US" dirty="0"/>
           </a:p>
           <a:p>
             <a:pPr marL="571500" indent="-571500">
@@ -5284,16 +5218,8 @@
               <a:buChar char="-"/>
             </a:pPr>
             <a:r>
-              <a:rPr lang="en-US" sz="4400" dirty="0" smtClean="0"/>
-              <a:t>At </a:t>
-            </a:r>
-            <a:r>
               <a:rPr lang="en-US" sz="4400" dirty="0"/>
-              <a:t>the </a:t>
-            </a:r>
-            <a:r>
-              <a:rPr lang="en-US" sz="4400" dirty="0" smtClean="0"/>
-              <a:t>bottom, every person starts alone</a:t>
+              <a:t>At the bottom, every person starts alone</a:t>
             </a:r>
           </a:p>
           <a:p>
@@ -5302,7 +5228,7 @@
               <a:buChar char="-"/>
             </a:pPr>
             <a:r>
-              <a:rPr lang="en-US" sz="4400" dirty="0" smtClean="0"/>
+              <a:rPr lang="en-US" sz="4400" dirty="0"/>
               <a:t>As you go up, people are connected based on who is most closely related to them</a:t>
             </a:r>
           </a:p>
@@ -5312,10 +5238,9 @@
               <a:buChar char="-"/>
             </a:pPr>
             <a:r>
-              <a:rPr lang="en-US" sz="4400" dirty="0" smtClean="0"/>
+              <a:rPr lang="en-US" sz="4400" dirty="0"/>
               <a:t>At the top, all the people are connected in one big family</a:t>
             </a:r>
-            <a:endParaRPr lang="en-US" sz="4400" dirty="0"/>
           </a:p>
         </p:txBody>
       </p:sp>
@@ -5329,13 +5254,6 @@
   <p:clrMapOvr>
     <a:masterClrMapping/>
   </p:clrMapOvr>
-  <p:timing>
-    <p:tnLst>
-      <p:par>
-        <p:cTn id="1" dur="indefinite" restart="never" nodeType="tmRoot"/>
-      </p:par>
-    </p:tnLst>
-  </p:timing>
 </p:sld>
 </file>
 
@@ -5379,12 +5297,12 @@
           <a:lstStyle/>
           <a:p>
             <a:r>
-              <a:rPr lang="en-US" sz="4400" b="1" dirty="0" smtClean="0"/>
+              <a:rPr lang="en-US" sz="4400" b="1" dirty="0"/>
               <a:t>In HC:</a:t>
             </a:r>
           </a:p>
           <a:p>
-            <a:endParaRPr lang="en-US" b="1" dirty="0" smtClean="0"/>
+            <a:endParaRPr lang="en-US" b="1" dirty="0"/>
           </a:p>
           <a:p>
             <a:pPr marL="571500" indent="-571500">
@@ -5392,7 +5310,7 @@
               <a:buChar char="-"/>
             </a:pPr>
             <a:r>
-              <a:rPr lang="en-US" sz="4400" dirty="0" smtClean="0"/>
+              <a:rPr lang="en-US" sz="4400" dirty="0"/>
               <a:t>every data point starts in its own “family”</a:t>
             </a:r>
           </a:p>
@@ -5402,7 +5320,7 @@
               <a:buChar char="-"/>
             </a:pPr>
             <a:r>
-              <a:rPr lang="en-US" sz="4400" dirty="0" smtClean="0"/>
+              <a:rPr lang="en-US" sz="4400" dirty="0"/>
               <a:t>then we merge the closest data points or clusters together step by step</a:t>
             </a:r>
           </a:p>
@@ -5412,10 +5330,9 @@
               <a:buChar char="-"/>
             </a:pPr>
             <a:r>
-              <a:rPr lang="en-US" sz="4400" dirty="0" smtClean="0"/>
+              <a:rPr lang="en-US" sz="4400" dirty="0"/>
               <a:t>this process continues until everything is in one big “family”</a:t>
             </a:r>
-            <a:endParaRPr lang="en-US" sz="4400" dirty="0"/>
           </a:p>
         </p:txBody>
       </p:sp>
@@ -5429,13 +5346,6 @@
   <p:clrMapOvr>
     <a:masterClrMapping/>
   </p:clrMapOvr>
-  <p:timing>
-    <p:tnLst>
-      <p:par>
-        <p:cTn id="1" dur="indefinite" restart="never" nodeType="tmRoot"/>
-      </p:par>
-    </p:tnLst>
-  </p:timing>
 </p:sld>
 </file>
 
@@ -5479,7 +5389,7 @@
           <a:lstStyle/>
           <a:p>
             <a:r>
-              <a:rPr lang="en-US" sz="4400" b="1" dirty="0" smtClean="0"/>
+              <a:rPr lang="en-US" sz="4400" b="1" dirty="0"/>
               <a:t>Example: Grouping Friends</a:t>
             </a:r>
           </a:p>
@@ -5488,7 +5398,7 @@
           </a:p>
           <a:p>
             <a:r>
-              <a:rPr lang="en-US" sz="4400" dirty="0" smtClean="0"/>
+              <a:rPr lang="en-US" sz="4400" dirty="0"/>
               <a:t>Imagine you have 10 friends, and you want to group them based on how much time they spend together. Here’s how HC works:</a:t>
             </a:r>
             <a:endParaRPr lang="en-PH" sz="4400" dirty="0">
@@ -5508,13 +5418,6 @@
   <p:clrMapOvr>
     <a:masterClrMapping/>
   </p:clrMapOvr>
-  <p:timing>
-    <p:tnLst>
-      <p:par>
-        <p:cTn id="1" dur="indefinite" restart="never" nodeType="tmRoot"/>
-      </p:par>
-    </p:tnLst>
-  </p:timing>
 </p:sld>
 </file>
 
@@ -5558,11 +5461,11 @@
           <a:lstStyle/>
           <a:p>
             <a:r>
-              <a:rPr lang="en-US" sz="4400" b="1" dirty="0" smtClean="0"/>
+              <a:rPr lang="en-US" sz="4400" b="1" dirty="0"/>
               <a:t>Start with individuals: </a:t>
             </a:r>
             <a:r>
-              <a:rPr lang="en-US" sz="4400" dirty="0" smtClean="0"/>
+              <a:rPr lang="en-US" sz="4400" dirty="0"/>
               <a:t>At first, each friend is in their own group</a:t>
             </a:r>
           </a:p>
@@ -5574,14 +5477,13 @@
           </a:p>
           <a:p>
             <a:r>
-              <a:rPr lang="en-US" sz="4400" b="1" dirty="0" smtClean="0"/>
+              <a:rPr lang="en-US" sz="4400" b="1" dirty="0"/>
               <a:t>Find the closest friends: </a:t>
             </a:r>
             <a:r>
-              <a:rPr lang="en-US" sz="4400" dirty="0" smtClean="0"/>
+              <a:rPr lang="en-US" sz="4400" dirty="0"/>
               <a:t>You check which two friends spend the most time together and group them.</a:t>
             </a:r>
-            <a:endParaRPr lang="en-US" sz="4400" dirty="0"/>
           </a:p>
         </p:txBody>
       </p:sp>
@@ -5595,13 +5497,6 @@
   <p:clrMapOvr>
     <a:masterClrMapping/>
   </p:clrMapOvr>
-  <p:timing>
-    <p:tnLst>
-      <p:par>
-        <p:cTn id="1" dur="indefinite" restart="never" nodeType="tmRoot"/>
-      </p:par>
-    </p:tnLst>
-  </p:timing>
 </p:sld>
 </file>
 
@@ -5645,11 +5540,11 @@
           <a:lstStyle/>
           <a:p>
             <a:r>
-              <a:rPr lang="en-US" sz="4400" b="1" dirty="0" smtClean="0"/>
+              <a:rPr lang="en-US" sz="4400" b="1" dirty="0"/>
               <a:t>Keep Grouping: </a:t>
             </a:r>
             <a:r>
-              <a:rPr lang="en-US" sz="4400" dirty="0" smtClean="0"/>
+              <a:rPr lang="en-US" sz="4400" dirty="0"/>
               <a:t>Then you check which group of friends is closest to another and keep combining the groups.</a:t>
             </a:r>
           </a:p>
@@ -5661,14 +5556,13 @@
           </a:p>
           <a:p>
             <a:r>
-              <a:rPr lang="en-US" sz="4400" b="1" dirty="0" smtClean="0"/>
+              <a:rPr lang="en-US" sz="4400" b="1" dirty="0"/>
               <a:t>One Big Group: </a:t>
             </a:r>
             <a:r>
-              <a:rPr lang="en-US" sz="4400" dirty="0" smtClean="0"/>
+              <a:rPr lang="en-US" sz="4400" dirty="0"/>
               <a:t>At the end, you have one big group than shows how all the friends are connected to each other.</a:t>
             </a:r>
-            <a:endParaRPr lang="en-US" sz="4400" dirty="0"/>
           </a:p>
         </p:txBody>
       </p:sp>
@@ -5682,13 +5576,6 @@
   <p:clrMapOvr>
     <a:masterClrMapping/>
   </p:clrMapOvr>
-  <p:timing>
-    <p:tnLst>
-      <p:par>
-        <p:cTn id="1" dur="indefinite" restart="never" nodeType="tmRoot"/>
-      </p:par>
-    </p:tnLst>
-  </p:timing>
 </p:sld>
 </file>
 
@@ -5733,18 +5620,18 @@
           <a:p>
             <a:pPr algn="ctr"/>
             <a:r>
-              <a:rPr lang="en-US" sz="7200" b="1" dirty="0" err="1" smtClean="0"/>
+              <a:rPr lang="en-US" sz="7200" b="1" dirty="0" err="1"/>
               <a:t>Dendrogram</a:t>
             </a:r>
             <a:r>
-              <a:rPr lang="en-US" sz="7200" b="1" dirty="0" smtClean="0"/>
+              <a:rPr lang="en-US" sz="7200" b="1" dirty="0"/>
               <a:t>: </a:t>
             </a:r>
           </a:p>
           <a:p>
             <a:pPr algn="ctr"/>
             <a:r>
-              <a:rPr lang="en-US" sz="7200" b="1" dirty="0" smtClean="0"/>
+              <a:rPr lang="en-US" sz="7200" b="1" dirty="0"/>
               <a:t>The Tree of Clusters</a:t>
             </a:r>
             <a:endParaRPr lang="en-US" sz="7200" b="1" dirty="0">
@@ -5764,13 +5651,6 @@
   <p:clrMapOvr>
     <a:masterClrMapping/>
   </p:clrMapOvr>
-  <p:timing>
-    <p:tnLst>
-      <p:par>
-        <p:cTn id="1" dur="indefinite" restart="never" nodeType="tmRoot"/>
-      </p:par>
-    </p:tnLst>
-  </p:timing>
 </p:sld>
 </file>
 
@@ -5814,21 +5694,21 @@
           <a:lstStyle/>
           <a:p>
             <a:r>
-              <a:rPr lang="en-US" sz="3200" dirty="0" smtClean="0">
+              <a:rPr lang="en-US" sz="3200" dirty="0">
                 <a:latin typeface="Arial" pitchFamily="34" charset="0"/>
                 <a:cs typeface="Arial" pitchFamily="34" charset="0"/>
               </a:rPr>
               <a:t>Now, let’s talk about the </a:t>
             </a:r>
             <a:r>
-              <a:rPr lang="en-US" sz="3200" b="1" dirty="0" err="1" smtClean="0">
+              <a:rPr lang="en-US" sz="3200" b="1" dirty="0" err="1">
                 <a:latin typeface="Arial" pitchFamily="34" charset="0"/>
                 <a:cs typeface="Arial" pitchFamily="34" charset="0"/>
               </a:rPr>
               <a:t>dendrogram</a:t>
             </a:r>
             <a:r>
-              <a:rPr lang="en-US" sz="3200" dirty="0" smtClean="0">
+              <a:rPr lang="en-US" sz="3200" dirty="0">
                 <a:latin typeface="Arial" pitchFamily="34" charset="0"/>
                 <a:cs typeface="Arial" pitchFamily="34" charset="0"/>
               </a:rPr>
@@ -5904,11 +5784,7 @@
           <a:p>
             <a:r>
               <a:rPr lang="en-US" sz="2800" dirty="0"/>
-              <a:t>You can "cut" this tree at any height to decide how many groups of friends you want</a:t>
-            </a:r>
-            <a:r>
-              <a:rPr lang="en-US" sz="2800" dirty="0" smtClean="0"/>
-              <a:t>.</a:t>
+              <a:t>You can "cut" this tree at any height to decide how many groups of friends you want.</a:t>
             </a:r>
           </a:p>
           <a:p>
@@ -5916,12 +5792,8 @@
           </a:p>
           <a:p>
             <a:r>
-              <a:rPr lang="en-US" sz="2800" dirty="0" smtClean="0"/>
-              <a:t> </a:t>
-            </a:r>
-            <a:r>
               <a:rPr lang="en-US" sz="2800" dirty="0"/>
-              <a:t>If you cut it higher, you get fewer, larger groups. If you cut it lower, you get more, smaller groups.</a:t>
+              <a:t> If you cut it higher, you get fewer, larger groups. If you cut it lower, you get more, smaller groups.</a:t>
             </a:r>
             <a:endParaRPr lang="en-PH" sz="2800" dirty="0">
               <a:latin typeface="Arial" pitchFamily="34" charset="0"/>
@@ -5940,13 +5812,6 @@
   <p:clrMapOvr>
     <a:masterClrMapping/>
   </p:clrMapOvr>
-  <p:timing>
-    <p:tnLst>
-      <p:par>
-        <p:cTn id="1" dur="indefinite" restart="never" nodeType="tmRoot"/>
-      </p:par>
-    </p:tnLst>
-  </p:timing>
 </p:sld>
 </file>
 
@@ -6490,7 +6355,7 @@
   <a:extraClrSchemeLst/>
   <a:extLst>
     <a:ext uri="{05A4C25C-085E-4340-85A3-A5531E510DB2}">
-      <thm15:themeFamily xmlns:thm15="http://schemas.microsoft.com/office/thememl/2012/main" xmlns="" name="Office Theme" id="{62F939B6-93AF-4DB8-9C6B-D6C7DFDC589F}" vid="{4A3C46E8-61CC-4603-A589-7422A47A8E4A}"/>
+      <thm15:themeFamily xmlns:thm15="http://schemas.microsoft.com/office/thememl/2012/main" name="Office Theme" id="{62F939B6-93AF-4DB8-9C6B-D6C7DFDC589F}" vid="{4A3C46E8-61CC-4603-A589-7422A47A8E4A}"/>
     </a:ext>
   </a:extLst>
 </a:theme>
